--- a/docs/Lab/Lab03_04_Summary.pptx
+++ b/docs/Lab/Lab03_04_Summary.pptx
@@ -11,6 +11,10 @@
     <p:sldId id="259" r:id="rId5"/>
     <p:sldId id="257" r:id="rId6"/>
     <p:sldId id="258" r:id="rId7"/>
+    <p:sldId id="260" r:id="rId8"/>
+    <p:sldId id="261" r:id="rId9"/>
+    <p:sldId id="262" r:id="rId10"/>
+    <p:sldId id="263" r:id="rId11"/>
   </p:sldIdLst>
   <p:sldSz cx="12192000" cy="6858000"/>
   <p:notesSz cx="6858000" cy="9144000"/>
@@ -362,7 +366,7 @@
           <a:p>
             <a:fld id="{FBBD7142-2D62-4275-8D30-E189AD7A810B}" type="datetimeFigureOut">
               <a:rPr lang="en-US" smtClean="0"/>
-              <a:t>9/22/2025</a:t>
+              <a:t>9/23/2025</a:t>
             </a:fld>
             <a:endParaRPr lang="en-US"/>
           </a:p>
@@ -565,7 +569,7 @@
           <a:p>
             <a:fld id="{FBBD7142-2D62-4275-8D30-E189AD7A810B}" type="datetimeFigureOut">
               <a:rPr lang="en-US" smtClean="0"/>
-              <a:t>9/22/2025</a:t>
+              <a:t>9/23/2025</a:t>
             </a:fld>
             <a:endParaRPr lang="en-US"/>
           </a:p>
@@ -927,7 +931,7 @@
           <a:p>
             <a:fld id="{FBBD7142-2D62-4275-8D30-E189AD7A810B}" type="datetimeFigureOut">
               <a:rPr lang="en-US" smtClean="0"/>
-              <a:t>9/22/2025</a:t>
+              <a:t>9/23/2025</a:t>
             </a:fld>
             <a:endParaRPr lang="en-US"/>
           </a:p>
@@ -1238,7 +1242,7 @@
           <a:p>
             <a:fld id="{A720AEDC-E445-4777-AA58-256DBE856A2E}" type="datetime1">
               <a:rPr lang="en-US" smtClean="0"/>
-              <a:t>9/22/2025</a:t>
+              <a:t>9/23/2025</a:t>
             </a:fld>
             <a:endParaRPr lang="en-US"/>
           </a:p>
@@ -1437,7 +1441,7 @@
           <a:p>
             <a:fld id="{2AFFDC0E-2571-4B49-A099-A35911FE2571}" type="datetime1">
               <a:rPr lang="en-US" smtClean="0"/>
-              <a:t>9/22/2025</a:t>
+              <a:t>9/23/2025</a:t>
             </a:fld>
             <a:endParaRPr lang="en-US"/>
           </a:p>
@@ -1750,7 +1754,7 @@
           <a:p>
             <a:fld id="{52A49ABB-4417-47CD-80B9-0D55D8A8F9A6}" type="datetime1">
               <a:rPr lang="en-US" smtClean="0"/>
-              <a:t>9/22/2025</a:t>
+              <a:t>9/23/2025</a:t>
             </a:fld>
             <a:endParaRPr lang="en-US"/>
           </a:p>
@@ -2004,7 +2008,7 @@
           <a:p>
             <a:fld id="{5A34475E-0273-439D-974C-8782C6CF6085}" type="datetime1">
               <a:rPr lang="en-US" smtClean="0"/>
-              <a:t>9/22/2025</a:t>
+              <a:t>9/23/2025</a:t>
             </a:fld>
             <a:endParaRPr lang="en-US"/>
           </a:p>
@@ -2427,7 +2431,7 @@
           <a:p>
             <a:fld id="{D3C4C3F7-B696-4E33-B8CA-A5029D94236E}" type="datetime1">
               <a:rPr lang="en-US" smtClean="0"/>
-              <a:t>9/22/2025</a:t>
+              <a:t>9/23/2025</a:t>
             </a:fld>
             <a:endParaRPr lang="en-US"/>
           </a:p>
@@ -2551,7 +2555,7 @@
           <a:p>
             <a:fld id="{19F242B4-A1B4-4224-ACE8-F64A6DFDF6CB}" type="datetime1">
               <a:rPr lang="en-US" smtClean="0"/>
-              <a:t>9/22/2025</a:t>
+              <a:t>9/23/2025</a:t>
             </a:fld>
             <a:endParaRPr lang="en-US"/>
           </a:p>
@@ -2647,7 +2651,7 @@
           <a:p>
             <a:fld id="{16D0FCFC-EFD5-4D6F-AF5D-114622F47081}" type="datetime1">
               <a:rPr lang="en-US" smtClean="0"/>
-              <a:t>9/22/2025</a:t>
+              <a:t>9/23/2025</a:t>
             </a:fld>
             <a:endParaRPr lang="en-US"/>
           </a:p>
@@ -3025,7 +3029,7 @@
           <a:p>
             <a:fld id="{FAFBCFB9-675F-4800-8AC7-ED3B357177A4}" type="datetime1">
               <a:rPr lang="en-US" smtClean="0"/>
-              <a:t>9/22/2025</a:t>
+              <a:t>9/23/2025</a:t>
             </a:fld>
             <a:endParaRPr lang="en-US"/>
           </a:p>
@@ -3234,7 +3238,7 @@
           <a:p>
             <a:fld id="{FBBD7142-2D62-4275-8D30-E189AD7A810B}" type="datetimeFigureOut">
               <a:rPr lang="en-US" smtClean="0"/>
-              <a:t>9/22/2025</a:t>
+              <a:t>9/23/2025</a:t>
             </a:fld>
             <a:endParaRPr lang="en-US"/>
           </a:p>
@@ -3516,7 +3520,7 @@
           <a:p>
             <a:fld id="{9D67AFB5-74EF-4A25-966B-E982CF09D51D}" type="datetime1">
               <a:rPr lang="en-US" smtClean="0"/>
-              <a:t>9/22/2025</a:t>
+              <a:t>9/23/2025</a:t>
             </a:fld>
             <a:endParaRPr lang="en-US"/>
           </a:p>
@@ -3708,7 +3712,7 @@
           <a:p>
             <a:fld id="{637A43A2-25E5-4F4A-8CC5-2EB1720C6339}" type="datetime1">
               <a:rPr lang="en-US" smtClean="0"/>
-              <a:t>9/22/2025</a:t>
+              <a:t>9/23/2025</a:t>
             </a:fld>
             <a:endParaRPr lang="en-US"/>
           </a:p>
@@ -4071,7 +4075,7 @@
           <a:p>
             <a:fld id="{B211E9CE-A9D6-4C10-9743-25DD5C510D14}" type="datetime1">
               <a:rPr lang="en-US" smtClean="0"/>
-              <a:t>9/22/2025</a:t>
+              <a:t>9/23/2025</a:t>
             </a:fld>
             <a:endParaRPr lang="en-US"/>
           </a:p>
@@ -4383,7 +4387,7 @@
           <a:p>
             <a:fld id="{ED291B17-9318-49DB-B28B-6E5994AE9581}" type="datetime1">
               <a:rPr lang="en-US" smtClean="0"/>
-              <a:t>9/22/2025</a:t>
+              <a:t>9/23/2025</a:t>
             </a:fld>
             <a:endParaRPr lang="en-US" dirty="0"/>
           </a:p>
@@ -4581,7 +4585,7 @@
           <a:p>
             <a:fld id="{78DD82B9-B8EE-4375-B6FF-88FA6ABB15D9}" type="datetime1">
               <a:rPr lang="en-US" smtClean="0"/>
-              <a:t>9/22/2025</a:t>
+              <a:t>9/23/2025</a:t>
             </a:fld>
             <a:endParaRPr lang="en-US" dirty="0"/>
           </a:p>
@@ -4893,7 +4897,7 @@
           <a:p>
             <a:fld id="{B2497495-0637-405E-AE64-5CC7506D51F5}" type="datetime1">
               <a:rPr lang="en-US" smtClean="0"/>
-              <a:t>9/22/2025</a:t>
+              <a:t>9/23/2025</a:t>
             </a:fld>
             <a:endParaRPr lang="en-US" dirty="0"/>
           </a:p>
@@ -5146,7 +5150,7 @@
           <a:p>
             <a:fld id="{7BFFD690-9426-415D-8B65-26881E07B2D4}" type="datetime1">
               <a:rPr lang="en-US" smtClean="0"/>
-              <a:t>9/22/2025</a:t>
+              <a:t>9/23/2025</a:t>
             </a:fld>
             <a:endParaRPr lang="en-US" dirty="0"/>
           </a:p>
@@ -5568,7 +5572,7 @@
           <a:p>
             <a:fld id="{04C4989A-474C-40DE-95B9-011C28B71673}" type="datetime1">
               <a:rPr lang="en-US" smtClean="0"/>
-              <a:t>9/22/2025</a:t>
+              <a:t>9/23/2025</a:t>
             </a:fld>
             <a:endParaRPr lang="en-US" dirty="0"/>
           </a:p>
@@ -5691,7 +5695,7 @@
           <a:p>
             <a:fld id="{5DB4ED54-5B5E-4A04-93D3-5772E3CE3818}" type="datetime1">
               <a:rPr lang="en-US" smtClean="0"/>
-              <a:t>9/22/2025</a:t>
+              <a:t>9/23/2025</a:t>
             </a:fld>
             <a:endParaRPr lang="en-US" dirty="0"/>
           </a:p>
@@ -5786,7 +5790,7 @@
           <a:p>
             <a:fld id="{4EDE50D6-574B-40AF-946F-D52A04ADE379}" type="datetime1">
               <a:rPr lang="en-US" smtClean="0"/>
-              <a:t>9/22/2025</a:t>
+              <a:t>9/23/2025</a:t>
             </a:fld>
             <a:endParaRPr lang="en-US" dirty="0"/>
           </a:p>
@@ -6086,7 +6090,7 @@
           <a:p>
             <a:fld id="{FBBD7142-2D62-4275-8D30-E189AD7A810B}" type="datetimeFigureOut">
               <a:rPr lang="en-US" smtClean="0"/>
-              <a:t>9/22/2025</a:t>
+              <a:t>9/23/2025</a:t>
             </a:fld>
             <a:endParaRPr lang="en-US"/>
           </a:p>
@@ -6475,7 +6479,7 @@
           <a:p>
             <a:fld id="{D82884F1-FFEA-405F-9602-3DCA865EDA4E}" type="datetime1">
               <a:rPr lang="en-US" smtClean="0"/>
-              <a:t>9/22/2025</a:t>
+              <a:t>9/23/2025</a:t>
             </a:fld>
             <a:endParaRPr lang="en-US" dirty="0"/>
           </a:p>
@@ -6768,7 +6772,7 @@
           <a:p>
             <a:fld id="{7E18DB4A-8810-4A10-AD5C-D5E2C667F5B3}" type="datetime1">
               <a:rPr lang="en-US" smtClean="0"/>
-              <a:t>9/22/2025</a:t>
+              <a:t>9/23/2025</a:t>
             </a:fld>
             <a:endParaRPr lang="en-US" dirty="0"/>
           </a:p>
@@ -6960,7 +6964,7 @@
           <a:p>
             <a:fld id="{2CED4963-E985-44C4-B8C4-FDD613B7C2F8}" type="datetime1">
               <a:rPr lang="en-US" smtClean="0"/>
-              <a:t>9/22/2025</a:t>
+              <a:t>9/23/2025</a:t>
             </a:fld>
             <a:endParaRPr lang="en-US" dirty="0"/>
           </a:p>
@@ -7322,7 +7326,7 @@
           <a:p>
             <a:fld id="{ED291B17-9318-49DB-B28B-6E5994AE9581}" type="datetime1">
               <a:rPr lang="en-US" smtClean="0"/>
-              <a:t>9/22/2025</a:t>
+              <a:t>9/23/2025</a:t>
             </a:fld>
             <a:endParaRPr lang="en-US" dirty="0"/>
           </a:p>
@@ -7744,7 +7748,7 @@
           <a:p>
             <a:fld id="{FBBD7142-2D62-4275-8D30-E189AD7A810B}" type="datetimeFigureOut">
               <a:rPr lang="en-US" smtClean="0"/>
-              <a:t>9/22/2025</a:t>
+              <a:t>9/23/2025</a:t>
             </a:fld>
             <a:endParaRPr lang="en-US"/>
           </a:p>
@@ -8166,7 +8170,7 @@
           <a:p>
             <a:fld id="{FBBD7142-2D62-4275-8D30-E189AD7A810B}" type="datetimeFigureOut">
               <a:rPr lang="en-US" smtClean="0"/>
-              <a:t>9/22/2025</a:t>
+              <a:t>9/23/2025</a:t>
             </a:fld>
             <a:endParaRPr lang="en-US"/>
           </a:p>
@@ -8289,7 +8293,7 @@
           <a:p>
             <a:fld id="{FBBD7142-2D62-4275-8D30-E189AD7A810B}" type="datetimeFigureOut">
               <a:rPr lang="en-US" smtClean="0"/>
-              <a:t>9/22/2025</a:t>
+              <a:t>9/23/2025</a:t>
             </a:fld>
             <a:endParaRPr lang="en-US"/>
           </a:p>
@@ -8384,7 +8388,7 @@
           <a:p>
             <a:fld id="{FBBD7142-2D62-4275-8D30-E189AD7A810B}" type="datetimeFigureOut">
               <a:rPr lang="en-US" smtClean="0"/>
-              <a:t>9/22/2025</a:t>
+              <a:t>9/23/2025</a:t>
             </a:fld>
             <a:endParaRPr lang="en-US"/>
           </a:p>
@@ -8761,7 +8765,7 @@
           <a:p>
             <a:fld id="{FBBD7142-2D62-4275-8D30-E189AD7A810B}" type="datetimeFigureOut">
               <a:rPr lang="en-US" smtClean="0"/>
-              <a:t>9/22/2025</a:t>
+              <a:t>9/23/2025</a:t>
             </a:fld>
             <a:endParaRPr lang="en-US"/>
           </a:p>
@@ -9053,7 +9057,7 @@
           <a:p>
             <a:fld id="{FBBD7142-2D62-4275-8D30-E189AD7A810B}" type="datetimeFigureOut">
               <a:rPr lang="en-US" smtClean="0"/>
-              <a:t>9/22/2025</a:t>
+              <a:t>9/23/2025</a:t>
             </a:fld>
             <a:endParaRPr lang="en-US"/>
           </a:p>
@@ -9267,7 +9271,7 @@
           <a:p>
             <a:fld id="{FBBD7142-2D62-4275-8D30-E189AD7A810B}" type="datetimeFigureOut">
               <a:rPr lang="en-US" smtClean="0"/>
-              <a:t>9/22/2025</a:t>
+              <a:t>9/23/2025</a:t>
             </a:fld>
             <a:endParaRPr lang="en-US"/>
           </a:p>
@@ -10067,7 +10071,7 @@
           <a:p>
             <a:fld id="{775824D9-FB06-4772-8A16-CEC7F6E704E4}" type="datetime1">
               <a:rPr lang="en-US" smtClean="0"/>
-              <a:t>9/22/2025</a:t>
+              <a:t>9/23/2025</a:t>
             </a:fld>
             <a:endParaRPr lang="en-US"/>
           </a:p>
@@ -10869,7 +10873,7 @@
           <a:p>
             <a:fld id="{ED291B17-9318-49DB-B28B-6E5994AE9581}" type="datetime1">
               <a:rPr lang="en-US" smtClean="0"/>
-              <a:t>9/22/2025</a:t>
+              <a:t>9/23/2025</a:t>
             </a:fld>
             <a:endParaRPr lang="en-US" dirty="0"/>
           </a:p>
@@ -11827,42 +11831,6 @@
           </a:p>
         </p:txBody>
       </p:sp>
-      <p:sp>
-        <p:nvSpPr>
-          <p:cNvPr id="3" name="Subtitle 2">
-            <a:extLst>
-              <a:ext uri="{FF2B5EF4-FFF2-40B4-BE49-F238E27FC236}">
-                <a16:creationId xmlns:a16="http://schemas.microsoft.com/office/drawing/2014/main" id="{B2C9145E-CBDE-EF21-2EED-2958983E196D}"/>
-              </a:ext>
-            </a:extLst>
-          </p:cNvPr>
-          <p:cNvSpPr>
-            <a:spLocks noGrp="1"/>
-          </p:cNvSpPr>
-          <p:nvPr>
-            <p:ph type="subTitle" idx="1"/>
-          </p:nvPr>
-        </p:nvSpPr>
-        <p:spPr>
-          <a:xfrm>
-            <a:off x="1893715" y="4502576"/>
-            <a:ext cx="7574507" cy="1640983"/>
-          </a:xfrm>
-        </p:spPr>
-        <p:txBody>
-          <a:bodyPr anchor="t">
-            <a:normAutofit/>
-          </a:bodyPr>
-          <a:lstStyle/>
-          <a:p>
-            <a:endParaRPr lang="en-US" sz="3200">
-              <a:solidFill>
-                <a:srgbClr val="FFFFFF"/>
-              </a:solidFill>
-            </a:endParaRPr>
-          </a:p>
-        </p:txBody>
-      </p:sp>
     </p:spTree>
     <p:extLst>
       <p:ext uri="{BB962C8B-B14F-4D97-AF65-F5344CB8AC3E}">
@@ -12736,6 +12704,909 @@
     <p:extLst>
       <p:ext uri="{BB962C8B-B14F-4D97-AF65-F5344CB8AC3E}">
         <p14:creationId xmlns:p14="http://schemas.microsoft.com/office/powerpoint/2010/main" val="720521790"/>
+      </p:ext>
+    </p:extLst>
+  </p:cSld>
+  <p:clrMapOvr>
+    <a:masterClrMapping/>
+  </p:clrMapOvr>
+</p:sld>
+</file>
+
+<file path=ppt/slides/slide5.xml><?xml version="1.0" encoding="utf-8"?>
+<p:sld xmlns:a="http://schemas.openxmlformats.org/drawingml/2006/main" xmlns:r="http://schemas.openxmlformats.org/officeDocument/2006/relationships" xmlns:p="http://schemas.openxmlformats.org/presentationml/2006/main">
+  <p:cSld>
+    <p:spTree>
+      <p:nvGrpSpPr>
+        <p:cNvPr id="1" name=""/>
+        <p:cNvGrpSpPr/>
+        <p:nvPr/>
+      </p:nvGrpSpPr>
+      <p:grpSpPr>
+        <a:xfrm>
+          <a:off x="0" y="0"/>
+          <a:ext cx="0" cy="0"/>
+          <a:chOff x="0" y="0"/>
+          <a:chExt cx="0" cy="0"/>
+        </a:xfrm>
+      </p:grpSpPr>
+      <p:pic>
+        <p:nvPicPr>
+          <p:cNvPr id="5" name="Content Placeholder 4">
+            <a:extLst>
+              <a:ext uri="{FF2B5EF4-FFF2-40B4-BE49-F238E27FC236}">
+                <a16:creationId xmlns:a16="http://schemas.microsoft.com/office/drawing/2014/main" id="{3CFCDD4C-99CF-1361-98B1-991366D74030}"/>
+              </a:ext>
+            </a:extLst>
+          </p:cNvPr>
+          <p:cNvPicPr>
+            <a:picLocks noGrp="1" noChangeAspect="1"/>
+          </p:cNvPicPr>
+          <p:nvPr>
+            <p:ph idx="1"/>
+          </p:nvPr>
+        </p:nvPicPr>
+        <p:blipFill>
+          <a:blip r:embed="rId2"/>
+          <a:stretch>
+            <a:fillRect/>
+          </a:stretch>
+        </p:blipFill>
+        <p:spPr>
+          <a:xfrm>
+            <a:off x="5935278" y="2522057"/>
+            <a:ext cx="5222628" cy="3633787"/>
+          </a:xfrm>
+          <a:prstGeom prst="rect">
+            <a:avLst/>
+          </a:prstGeom>
+        </p:spPr>
+      </p:pic>
+      <p:sp>
+        <p:nvSpPr>
+          <p:cNvPr id="7" name="TextBox 6">
+            <a:extLst>
+              <a:ext uri="{FF2B5EF4-FFF2-40B4-BE49-F238E27FC236}">
+                <a16:creationId xmlns:a16="http://schemas.microsoft.com/office/drawing/2014/main" id="{FEBB9E6A-40A9-4164-BEFB-E235C7D72FCF}"/>
+              </a:ext>
+            </a:extLst>
+          </p:cNvPr>
+          <p:cNvSpPr txBox="1"/>
+          <p:nvPr/>
+        </p:nvSpPr>
+        <p:spPr>
+          <a:xfrm>
+            <a:off x="581194" y="1536192"/>
+            <a:ext cx="10467594" cy="814069"/>
+          </a:xfrm>
+          <a:prstGeom prst="rect">
+            <a:avLst/>
+          </a:prstGeom>
+          <a:noFill/>
+        </p:spPr>
+        <p:txBody>
+          <a:bodyPr wrap="square">
+            <a:spAutoFit/>
+          </a:bodyPr>
+          <a:lstStyle/>
+          <a:p>
+            <a:pPr>
+              <a:lnSpc>
+                <a:spcPct val="115000"/>
+              </a:lnSpc>
+              <a:spcAft>
+                <a:spcPts val="800"/>
+              </a:spcAft>
+              <a:buNone/>
+            </a:pPr>
+            <a:r>
+              <a:rPr lang="en-US" altLang="zh-CN" sz="1800" b="1" kern="100" dirty="0">
+                <a:effectLst/>
+                <a:latin typeface="DengXian" panose="02010600030101010101" pitchFamily="2" charset="-122"/>
+                <a:ea typeface="DengXian" panose="02010600030101010101" pitchFamily="2" charset="-122"/>
+                <a:cs typeface="Times New Roman" panose="02020603050405020304" pitchFamily="18" charset="0"/>
+              </a:rPr>
+              <a:t>Question 5. How many town halls in Faulkner county? (5 points)</a:t>
+            </a:r>
+            <a:endParaRPr lang="zh-CN" altLang="zh-CN" sz="1800" kern="100" dirty="0">
+              <a:effectLst/>
+              <a:latin typeface="DengXian" panose="02010600030101010101" pitchFamily="2" charset="-122"/>
+              <a:ea typeface="DengXian" panose="02010600030101010101" pitchFamily="2" charset="-122"/>
+              <a:cs typeface="Times New Roman" panose="02020603050405020304" pitchFamily="18" charset="0"/>
+            </a:endParaRPr>
+          </a:p>
+          <a:p>
+            <a:pPr>
+              <a:lnSpc>
+                <a:spcPct val="115000"/>
+              </a:lnSpc>
+              <a:spcAft>
+                <a:spcPts val="800"/>
+              </a:spcAft>
+              <a:buNone/>
+            </a:pPr>
+            <a:r>
+              <a:rPr lang="en-US" altLang="zh-CN" sz="1800" b="1" kern="100" dirty="0">
+                <a:effectLst/>
+                <a:latin typeface="DengXian" panose="02010600030101010101" pitchFamily="2" charset="-122"/>
+                <a:ea typeface="DengXian" panose="02010600030101010101" pitchFamily="2" charset="-122"/>
+                <a:cs typeface="Times New Roman" panose="02020603050405020304" pitchFamily="18" charset="0"/>
+              </a:rPr>
+              <a:t>Answer: 2</a:t>
+            </a:r>
+            <a:endParaRPr lang="zh-CN" altLang="zh-CN" sz="1800" kern="100" dirty="0">
+              <a:effectLst/>
+              <a:latin typeface="DengXian" panose="02010600030101010101" pitchFamily="2" charset="-122"/>
+              <a:ea typeface="DengXian" panose="02010600030101010101" pitchFamily="2" charset="-122"/>
+              <a:cs typeface="Times New Roman" panose="02020603050405020304" pitchFamily="18" charset="0"/>
+            </a:endParaRPr>
+          </a:p>
+        </p:txBody>
+      </p:sp>
+      <p:sp>
+        <p:nvSpPr>
+          <p:cNvPr id="8" name="Title 1">
+            <a:extLst>
+              <a:ext uri="{FF2B5EF4-FFF2-40B4-BE49-F238E27FC236}">
+                <a16:creationId xmlns:a16="http://schemas.microsoft.com/office/drawing/2014/main" id="{16F7F7E4-64CE-44BE-60BC-C67A06C0F42C}"/>
+              </a:ext>
+            </a:extLst>
+          </p:cNvPr>
+          <p:cNvSpPr txBox="1">
+            <a:spLocks/>
+          </p:cNvSpPr>
+          <p:nvPr/>
+        </p:nvSpPr>
+        <p:spPr>
+          <a:xfrm>
+            <a:off x="581194" y="702156"/>
+            <a:ext cx="11029616" cy="632868"/>
+          </a:xfrm>
+          <a:prstGeom prst="rect">
+            <a:avLst/>
+          </a:prstGeom>
+        </p:spPr>
+        <p:txBody>
+          <a:bodyPr vert="horz" lIns="91440" tIns="45720" rIns="91440" bIns="45720" rtlCol="0" anchor="b">
+            <a:normAutofit fontScale="97500"/>
+          </a:bodyPr>
+          <a:lstStyle>
+            <a:lvl1pPr algn="l" defTabSz="411470" rtl="0" eaLnBrk="1" latinLnBrk="0" hangingPunct="1">
+              <a:lnSpc>
+                <a:spcPct val="100000"/>
+              </a:lnSpc>
+              <a:spcBef>
+                <a:spcPct val="0"/>
+              </a:spcBef>
+              <a:buNone/>
+              <a:defRPr sz="2520" b="0" kern="1200" cap="all">
+                <a:solidFill>
+                  <a:schemeClr val="tx1">
+                    <a:lumMod val="75000"/>
+                    <a:lumOff val="25000"/>
+                  </a:schemeClr>
+                </a:solidFill>
+                <a:latin typeface="+mj-lt"/>
+                <a:ea typeface="+mj-ea"/>
+                <a:cs typeface="+mj-cs"/>
+              </a:defRPr>
+            </a:lvl1pPr>
+            <a:lvl2pPr eaLnBrk="1" hangingPunct="1">
+              <a:defRPr>
+                <a:solidFill>
+                  <a:schemeClr val="tx2"/>
+                </a:solidFill>
+              </a:defRPr>
+            </a:lvl2pPr>
+            <a:lvl3pPr eaLnBrk="1" hangingPunct="1">
+              <a:defRPr>
+                <a:solidFill>
+                  <a:schemeClr val="tx2"/>
+                </a:solidFill>
+              </a:defRPr>
+            </a:lvl3pPr>
+            <a:lvl4pPr eaLnBrk="1" hangingPunct="1">
+              <a:defRPr>
+                <a:solidFill>
+                  <a:schemeClr val="tx2"/>
+                </a:solidFill>
+              </a:defRPr>
+            </a:lvl4pPr>
+            <a:lvl5pPr eaLnBrk="1" hangingPunct="1">
+              <a:defRPr>
+                <a:solidFill>
+                  <a:schemeClr val="tx2"/>
+                </a:solidFill>
+              </a:defRPr>
+            </a:lvl5pPr>
+            <a:lvl6pPr eaLnBrk="1" hangingPunct="1">
+              <a:defRPr>
+                <a:solidFill>
+                  <a:schemeClr val="tx2"/>
+                </a:solidFill>
+              </a:defRPr>
+            </a:lvl6pPr>
+            <a:lvl7pPr eaLnBrk="1" hangingPunct="1">
+              <a:defRPr>
+                <a:solidFill>
+                  <a:schemeClr val="tx2"/>
+                </a:solidFill>
+              </a:defRPr>
+            </a:lvl7pPr>
+            <a:lvl8pPr eaLnBrk="1" hangingPunct="1">
+              <a:defRPr>
+                <a:solidFill>
+                  <a:schemeClr val="tx2"/>
+                </a:solidFill>
+              </a:defRPr>
+            </a:lvl8pPr>
+            <a:lvl9pPr eaLnBrk="1" hangingPunct="1">
+              <a:defRPr>
+                <a:solidFill>
+                  <a:schemeClr val="tx2"/>
+                </a:solidFill>
+              </a:defRPr>
+            </a:lvl9pPr>
+          </a:lstStyle>
+          <a:p>
+            <a:r>
+              <a:rPr lang="en-US" sz="3600" dirty="0"/>
+              <a:t>Lab 04</a:t>
+            </a:r>
+          </a:p>
+        </p:txBody>
+      </p:sp>
+    </p:spTree>
+    <p:extLst>
+      <p:ext uri="{BB962C8B-B14F-4D97-AF65-F5344CB8AC3E}">
+        <p14:creationId xmlns:p14="http://schemas.microsoft.com/office/powerpoint/2010/main" val="1113730194"/>
+      </p:ext>
+    </p:extLst>
+  </p:cSld>
+  <p:clrMapOvr>
+    <a:masterClrMapping/>
+  </p:clrMapOvr>
+</p:sld>
+</file>
+
+<file path=ppt/slides/slide6.xml><?xml version="1.0" encoding="utf-8"?>
+<p:sld xmlns:a="http://schemas.openxmlformats.org/drawingml/2006/main" xmlns:r="http://schemas.openxmlformats.org/officeDocument/2006/relationships" xmlns:p="http://schemas.openxmlformats.org/presentationml/2006/main">
+  <p:cSld>
+    <p:spTree>
+      <p:nvGrpSpPr>
+        <p:cNvPr id="1" name=""/>
+        <p:cNvGrpSpPr/>
+        <p:nvPr/>
+      </p:nvGrpSpPr>
+      <p:grpSpPr>
+        <a:xfrm>
+          <a:off x="0" y="0"/>
+          <a:ext cx="0" cy="0"/>
+          <a:chOff x="0" y="0"/>
+          <a:chExt cx="0" cy="0"/>
+        </a:xfrm>
+      </p:grpSpPr>
+      <p:sp>
+        <p:nvSpPr>
+          <p:cNvPr id="7" name="Content Placeholder 6">
+            <a:extLst>
+              <a:ext uri="{FF2B5EF4-FFF2-40B4-BE49-F238E27FC236}">
+                <a16:creationId xmlns:a16="http://schemas.microsoft.com/office/drawing/2014/main" id="{42DE24D7-C02D-9372-E164-A7B4AD99CBBD}"/>
+              </a:ext>
+            </a:extLst>
+          </p:cNvPr>
+          <p:cNvSpPr>
+            <a:spLocks noGrp="1"/>
+          </p:cNvSpPr>
+          <p:nvPr>
+            <p:ph idx="1"/>
+          </p:nvPr>
+        </p:nvSpPr>
+        <p:spPr>
+          <a:xfrm>
+            <a:off x="420303" y="1417321"/>
+            <a:ext cx="11029615" cy="795527"/>
+          </a:xfrm>
+        </p:spPr>
+        <p:txBody>
+          <a:bodyPr/>
+          <a:lstStyle/>
+          <a:p>
+            <a:r>
+              <a:rPr lang="en-US" altLang="zh-CN" b="1" dirty="0"/>
+              <a:t>Question 6. How many town halls that are in Faulkner County and within 2 miles of a railroad? (5 points)</a:t>
+            </a:r>
+            <a:endParaRPr lang="zh-CN" altLang="zh-CN" dirty="0"/>
+          </a:p>
+          <a:p>
+            <a:r>
+              <a:rPr lang="en-US" altLang="zh-CN" b="1" dirty="0"/>
+              <a:t>Answer: 1</a:t>
+            </a:r>
+            <a:endParaRPr lang="zh-CN" altLang="zh-CN" dirty="0"/>
+          </a:p>
+        </p:txBody>
+      </p:sp>
+      <p:pic>
+        <p:nvPicPr>
+          <p:cNvPr id="9" name="Picture 8">
+            <a:extLst>
+              <a:ext uri="{FF2B5EF4-FFF2-40B4-BE49-F238E27FC236}">
+                <a16:creationId xmlns:a16="http://schemas.microsoft.com/office/drawing/2014/main" id="{FE966D3A-01F7-DCAC-48F1-0D995BF1D41A}"/>
+              </a:ext>
+            </a:extLst>
+          </p:cNvPr>
+          <p:cNvPicPr>
+            <a:picLocks noChangeAspect="1"/>
+          </p:cNvPicPr>
+          <p:nvPr/>
+        </p:nvPicPr>
+        <p:blipFill>
+          <a:blip r:embed="rId2"/>
+          <a:stretch>
+            <a:fillRect/>
+          </a:stretch>
+        </p:blipFill>
+        <p:spPr>
+          <a:xfrm>
+            <a:off x="5127666" y="2026697"/>
+            <a:ext cx="6644031" cy="4262821"/>
+          </a:xfrm>
+          <a:prstGeom prst="rect">
+            <a:avLst/>
+          </a:prstGeom>
+        </p:spPr>
+      </p:pic>
+      <p:sp>
+        <p:nvSpPr>
+          <p:cNvPr id="10" name="Title 1">
+            <a:extLst>
+              <a:ext uri="{FF2B5EF4-FFF2-40B4-BE49-F238E27FC236}">
+                <a16:creationId xmlns:a16="http://schemas.microsoft.com/office/drawing/2014/main" id="{0C61F33D-C451-BE7E-466F-C4C7C2C6117C}"/>
+              </a:ext>
+            </a:extLst>
+          </p:cNvPr>
+          <p:cNvSpPr txBox="1">
+            <a:spLocks/>
+          </p:cNvSpPr>
+          <p:nvPr/>
+        </p:nvSpPr>
+        <p:spPr>
+          <a:xfrm>
+            <a:off x="581192" y="568482"/>
+            <a:ext cx="11029616" cy="632868"/>
+          </a:xfrm>
+          <a:prstGeom prst="rect">
+            <a:avLst/>
+          </a:prstGeom>
+        </p:spPr>
+        <p:txBody>
+          <a:bodyPr vert="horz" lIns="91440" tIns="45720" rIns="91440" bIns="45720" rtlCol="0" anchor="b">
+            <a:normAutofit fontScale="97500"/>
+          </a:bodyPr>
+          <a:lstStyle>
+            <a:lvl1pPr algn="l" defTabSz="411470" rtl="0" eaLnBrk="1" latinLnBrk="0" hangingPunct="1">
+              <a:lnSpc>
+                <a:spcPct val="100000"/>
+              </a:lnSpc>
+              <a:spcBef>
+                <a:spcPct val="0"/>
+              </a:spcBef>
+              <a:buNone/>
+              <a:defRPr sz="2520" b="0" kern="1200" cap="all">
+                <a:solidFill>
+                  <a:schemeClr val="tx1">
+                    <a:lumMod val="75000"/>
+                    <a:lumOff val="25000"/>
+                  </a:schemeClr>
+                </a:solidFill>
+                <a:latin typeface="+mj-lt"/>
+                <a:ea typeface="+mj-ea"/>
+                <a:cs typeface="+mj-cs"/>
+              </a:defRPr>
+            </a:lvl1pPr>
+            <a:lvl2pPr eaLnBrk="1" hangingPunct="1">
+              <a:defRPr>
+                <a:solidFill>
+                  <a:schemeClr val="tx2"/>
+                </a:solidFill>
+              </a:defRPr>
+            </a:lvl2pPr>
+            <a:lvl3pPr eaLnBrk="1" hangingPunct="1">
+              <a:defRPr>
+                <a:solidFill>
+                  <a:schemeClr val="tx2"/>
+                </a:solidFill>
+              </a:defRPr>
+            </a:lvl3pPr>
+            <a:lvl4pPr eaLnBrk="1" hangingPunct="1">
+              <a:defRPr>
+                <a:solidFill>
+                  <a:schemeClr val="tx2"/>
+                </a:solidFill>
+              </a:defRPr>
+            </a:lvl4pPr>
+            <a:lvl5pPr eaLnBrk="1" hangingPunct="1">
+              <a:defRPr>
+                <a:solidFill>
+                  <a:schemeClr val="tx2"/>
+                </a:solidFill>
+              </a:defRPr>
+            </a:lvl5pPr>
+            <a:lvl6pPr eaLnBrk="1" hangingPunct="1">
+              <a:defRPr>
+                <a:solidFill>
+                  <a:schemeClr val="tx2"/>
+                </a:solidFill>
+              </a:defRPr>
+            </a:lvl6pPr>
+            <a:lvl7pPr eaLnBrk="1" hangingPunct="1">
+              <a:defRPr>
+                <a:solidFill>
+                  <a:schemeClr val="tx2"/>
+                </a:solidFill>
+              </a:defRPr>
+            </a:lvl7pPr>
+            <a:lvl8pPr eaLnBrk="1" hangingPunct="1">
+              <a:defRPr>
+                <a:solidFill>
+                  <a:schemeClr val="tx2"/>
+                </a:solidFill>
+              </a:defRPr>
+            </a:lvl8pPr>
+            <a:lvl9pPr eaLnBrk="1" hangingPunct="1">
+              <a:defRPr>
+                <a:solidFill>
+                  <a:schemeClr val="tx2"/>
+                </a:solidFill>
+              </a:defRPr>
+            </a:lvl9pPr>
+          </a:lstStyle>
+          <a:p>
+            <a:r>
+              <a:rPr lang="en-US" sz="3600" dirty="0"/>
+              <a:t>Lab 04</a:t>
+            </a:r>
+          </a:p>
+        </p:txBody>
+      </p:sp>
+    </p:spTree>
+    <p:extLst>
+      <p:ext uri="{BB962C8B-B14F-4D97-AF65-F5344CB8AC3E}">
+        <p14:creationId xmlns:p14="http://schemas.microsoft.com/office/powerpoint/2010/main" val="2851968054"/>
+      </p:ext>
+    </p:extLst>
+  </p:cSld>
+  <p:clrMapOvr>
+    <a:masterClrMapping/>
+  </p:clrMapOvr>
+</p:sld>
+</file>
+
+<file path=ppt/slides/slide7.xml><?xml version="1.0" encoding="utf-8"?>
+<p:sld xmlns:a="http://schemas.openxmlformats.org/drawingml/2006/main" xmlns:r="http://schemas.openxmlformats.org/officeDocument/2006/relationships" xmlns:p="http://schemas.openxmlformats.org/presentationml/2006/main">
+  <p:cSld>
+    <p:spTree>
+      <p:nvGrpSpPr>
+        <p:cNvPr id="1" name=""/>
+        <p:cNvGrpSpPr/>
+        <p:nvPr/>
+      </p:nvGrpSpPr>
+      <p:grpSpPr>
+        <a:xfrm>
+          <a:off x="0" y="0"/>
+          <a:ext cx="0" cy="0"/>
+          <a:chOff x="0" y="0"/>
+          <a:chExt cx="0" cy="0"/>
+        </a:xfrm>
+      </p:grpSpPr>
+      <p:sp>
+        <p:nvSpPr>
+          <p:cNvPr id="3" name="Content Placeholder 2">
+            <a:extLst>
+              <a:ext uri="{FF2B5EF4-FFF2-40B4-BE49-F238E27FC236}">
+                <a16:creationId xmlns:a16="http://schemas.microsoft.com/office/drawing/2014/main" id="{27603D40-BCBA-DBD0-9662-78D136DD6B4D}"/>
+              </a:ext>
+            </a:extLst>
+          </p:cNvPr>
+          <p:cNvSpPr>
+            <a:spLocks noGrp="1"/>
+          </p:cNvSpPr>
+          <p:nvPr>
+            <p:ph idx="1"/>
+          </p:nvPr>
+        </p:nvSpPr>
+        <p:spPr>
+          <a:xfrm>
+            <a:off x="484941" y="1455341"/>
+            <a:ext cx="4327691" cy="1759497"/>
+          </a:xfrm>
+        </p:spPr>
+        <p:txBody>
+          <a:bodyPr>
+            <a:normAutofit/>
+          </a:bodyPr>
+          <a:lstStyle/>
+          <a:p>
+            <a:r>
+              <a:rPr lang="en-US" altLang="zh-CN" sz="2000" b="1" dirty="0"/>
+              <a:t>Question 7. How many streams intersect a railroad? (5 Points) </a:t>
+            </a:r>
+            <a:endParaRPr lang="zh-CN" altLang="zh-CN" sz="2000" dirty="0"/>
+          </a:p>
+          <a:p>
+            <a:r>
+              <a:rPr lang="en-US" altLang="zh-CN" sz="2000" b="1" dirty="0"/>
+              <a:t>Answer: 19</a:t>
+            </a:r>
+            <a:endParaRPr lang="zh-CN" altLang="zh-CN" sz="2000" dirty="0"/>
+          </a:p>
+          <a:p>
+            <a:endParaRPr lang="zh-CN" altLang="en-US" sz="2000" dirty="0"/>
+          </a:p>
+        </p:txBody>
+      </p:sp>
+      <p:pic>
+        <p:nvPicPr>
+          <p:cNvPr id="5" name="Picture 4">
+            <a:extLst>
+              <a:ext uri="{FF2B5EF4-FFF2-40B4-BE49-F238E27FC236}">
+                <a16:creationId xmlns:a16="http://schemas.microsoft.com/office/drawing/2014/main" id="{37825F43-99E2-EF6D-DDF9-FDE65CB53861}"/>
+              </a:ext>
+            </a:extLst>
+          </p:cNvPr>
+          <p:cNvPicPr>
+            <a:picLocks noChangeAspect="1"/>
+          </p:cNvPicPr>
+          <p:nvPr/>
+        </p:nvPicPr>
+        <p:blipFill>
+          <a:blip r:embed="rId2"/>
+          <a:stretch>
+            <a:fillRect/>
+          </a:stretch>
+        </p:blipFill>
+        <p:spPr>
+          <a:xfrm>
+            <a:off x="5294746" y="1296516"/>
+            <a:ext cx="6486577" cy="5408708"/>
+          </a:xfrm>
+          <a:prstGeom prst="rect">
+            <a:avLst/>
+          </a:prstGeom>
+        </p:spPr>
+      </p:pic>
+      <p:sp>
+        <p:nvSpPr>
+          <p:cNvPr id="6" name="Title 1">
+            <a:extLst>
+              <a:ext uri="{FF2B5EF4-FFF2-40B4-BE49-F238E27FC236}">
+                <a16:creationId xmlns:a16="http://schemas.microsoft.com/office/drawing/2014/main" id="{D2880718-9CBB-6DCC-CD79-A4BF43F08A42}"/>
+              </a:ext>
+            </a:extLst>
+          </p:cNvPr>
+          <p:cNvSpPr txBox="1">
+            <a:spLocks/>
+          </p:cNvSpPr>
+          <p:nvPr/>
+        </p:nvSpPr>
+        <p:spPr>
+          <a:xfrm>
+            <a:off x="581192" y="568482"/>
+            <a:ext cx="11029616" cy="632868"/>
+          </a:xfrm>
+          <a:prstGeom prst="rect">
+            <a:avLst/>
+          </a:prstGeom>
+        </p:spPr>
+        <p:txBody>
+          <a:bodyPr vert="horz" lIns="91440" tIns="45720" rIns="91440" bIns="45720" rtlCol="0" anchor="b">
+            <a:normAutofit fontScale="97500"/>
+          </a:bodyPr>
+          <a:lstStyle>
+            <a:lvl1pPr algn="l" defTabSz="411470" rtl="0" eaLnBrk="1" latinLnBrk="0" hangingPunct="1">
+              <a:lnSpc>
+                <a:spcPct val="100000"/>
+              </a:lnSpc>
+              <a:spcBef>
+                <a:spcPct val="0"/>
+              </a:spcBef>
+              <a:buNone/>
+              <a:defRPr sz="2520" b="0" kern="1200" cap="all">
+                <a:solidFill>
+                  <a:schemeClr val="tx1">
+                    <a:lumMod val="75000"/>
+                    <a:lumOff val="25000"/>
+                  </a:schemeClr>
+                </a:solidFill>
+                <a:latin typeface="+mj-lt"/>
+                <a:ea typeface="+mj-ea"/>
+                <a:cs typeface="+mj-cs"/>
+              </a:defRPr>
+            </a:lvl1pPr>
+            <a:lvl2pPr eaLnBrk="1" hangingPunct="1">
+              <a:defRPr>
+                <a:solidFill>
+                  <a:schemeClr val="tx2"/>
+                </a:solidFill>
+              </a:defRPr>
+            </a:lvl2pPr>
+            <a:lvl3pPr eaLnBrk="1" hangingPunct="1">
+              <a:defRPr>
+                <a:solidFill>
+                  <a:schemeClr val="tx2"/>
+                </a:solidFill>
+              </a:defRPr>
+            </a:lvl3pPr>
+            <a:lvl4pPr eaLnBrk="1" hangingPunct="1">
+              <a:defRPr>
+                <a:solidFill>
+                  <a:schemeClr val="tx2"/>
+                </a:solidFill>
+              </a:defRPr>
+            </a:lvl4pPr>
+            <a:lvl5pPr eaLnBrk="1" hangingPunct="1">
+              <a:defRPr>
+                <a:solidFill>
+                  <a:schemeClr val="tx2"/>
+                </a:solidFill>
+              </a:defRPr>
+            </a:lvl5pPr>
+            <a:lvl6pPr eaLnBrk="1" hangingPunct="1">
+              <a:defRPr>
+                <a:solidFill>
+                  <a:schemeClr val="tx2"/>
+                </a:solidFill>
+              </a:defRPr>
+            </a:lvl6pPr>
+            <a:lvl7pPr eaLnBrk="1" hangingPunct="1">
+              <a:defRPr>
+                <a:solidFill>
+                  <a:schemeClr val="tx2"/>
+                </a:solidFill>
+              </a:defRPr>
+            </a:lvl7pPr>
+            <a:lvl8pPr eaLnBrk="1" hangingPunct="1">
+              <a:defRPr>
+                <a:solidFill>
+                  <a:schemeClr val="tx2"/>
+                </a:solidFill>
+              </a:defRPr>
+            </a:lvl8pPr>
+            <a:lvl9pPr eaLnBrk="1" hangingPunct="1">
+              <a:defRPr>
+                <a:solidFill>
+                  <a:schemeClr val="tx2"/>
+                </a:solidFill>
+              </a:defRPr>
+            </a:lvl9pPr>
+          </a:lstStyle>
+          <a:p>
+            <a:r>
+              <a:rPr lang="en-US" sz="3600" dirty="0"/>
+              <a:t>Lab 04</a:t>
+            </a:r>
+          </a:p>
+        </p:txBody>
+      </p:sp>
+    </p:spTree>
+    <p:extLst>
+      <p:ext uri="{BB962C8B-B14F-4D97-AF65-F5344CB8AC3E}">
+        <p14:creationId xmlns:p14="http://schemas.microsoft.com/office/powerpoint/2010/main" val="40264832"/>
+      </p:ext>
+    </p:extLst>
+  </p:cSld>
+  <p:clrMapOvr>
+    <a:masterClrMapping/>
+  </p:clrMapOvr>
+</p:sld>
+</file>
+
+<file path=ppt/slides/slide8.xml><?xml version="1.0" encoding="utf-8"?>
+<p:sld xmlns:a="http://schemas.openxmlformats.org/drawingml/2006/main" xmlns:r="http://schemas.openxmlformats.org/officeDocument/2006/relationships" xmlns:p="http://schemas.openxmlformats.org/presentationml/2006/main">
+  <p:cSld>
+    <p:spTree>
+      <p:nvGrpSpPr>
+        <p:cNvPr id="1" name=""/>
+        <p:cNvGrpSpPr/>
+        <p:nvPr/>
+      </p:nvGrpSpPr>
+      <p:grpSpPr>
+        <a:xfrm>
+          <a:off x="0" y="0"/>
+          <a:ext cx="0" cy="0"/>
+          <a:chOff x="0" y="0"/>
+          <a:chExt cx="0" cy="0"/>
+        </a:xfrm>
+      </p:grpSpPr>
+      <p:sp>
+        <p:nvSpPr>
+          <p:cNvPr id="3" name="Content Placeholder 2">
+            <a:extLst>
+              <a:ext uri="{FF2B5EF4-FFF2-40B4-BE49-F238E27FC236}">
+                <a16:creationId xmlns:a16="http://schemas.microsoft.com/office/drawing/2014/main" id="{5DDF51DF-B1E0-C3CA-8269-11D06DA92B5F}"/>
+              </a:ext>
+            </a:extLst>
+          </p:cNvPr>
+          <p:cNvSpPr>
+            <a:spLocks noGrp="1"/>
+          </p:cNvSpPr>
+          <p:nvPr>
+            <p:ph idx="1"/>
+          </p:nvPr>
+        </p:nvSpPr>
+        <p:spPr>
+          <a:xfrm>
+            <a:off x="581193" y="2898649"/>
+            <a:ext cx="4127967" cy="1453895"/>
+          </a:xfrm>
+        </p:spPr>
+        <p:txBody>
+          <a:bodyPr/>
+          <a:lstStyle/>
+          <a:p>
+            <a:r>
+              <a:rPr lang="en-US" altLang="zh-CN" b="1" dirty="0"/>
+              <a:t>Question 8. How many hydrographic landmarks are within 10 miles of a stream? (5 Points). </a:t>
+            </a:r>
+            <a:endParaRPr lang="zh-CN" altLang="zh-CN" dirty="0"/>
+          </a:p>
+          <a:p>
+            <a:r>
+              <a:rPr lang="en-US" altLang="zh-CN" b="1" dirty="0"/>
+              <a:t>Answer: 15</a:t>
+            </a:r>
+            <a:endParaRPr lang="zh-CN" altLang="zh-CN" dirty="0"/>
+          </a:p>
+        </p:txBody>
+      </p:sp>
+      <p:pic>
+        <p:nvPicPr>
+          <p:cNvPr id="5" name="Picture 4">
+            <a:extLst>
+              <a:ext uri="{FF2B5EF4-FFF2-40B4-BE49-F238E27FC236}">
+                <a16:creationId xmlns:a16="http://schemas.microsoft.com/office/drawing/2014/main" id="{7F5759B1-85C7-58A0-9229-6B0791EEF5F7}"/>
+              </a:ext>
+            </a:extLst>
+          </p:cNvPr>
+          <p:cNvPicPr>
+            <a:picLocks noChangeAspect="1"/>
+          </p:cNvPicPr>
+          <p:nvPr/>
+        </p:nvPicPr>
+        <p:blipFill>
+          <a:blip r:embed="rId2"/>
+          <a:stretch>
+            <a:fillRect/>
+          </a:stretch>
+        </p:blipFill>
+        <p:spPr>
+          <a:xfrm>
+            <a:off x="5237755" y="753749"/>
+            <a:ext cx="6706472" cy="5743694"/>
+          </a:xfrm>
+          <a:prstGeom prst="rect">
+            <a:avLst/>
+          </a:prstGeom>
+        </p:spPr>
+      </p:pic>
+      <p:sp>
+        <p:nvSpPr>
+          <p:cNvPr id="6" name="Title 1">
+            <a:extLst>
+              <a:ext uri="{FF2B5EF4-FFF2-40B4-BE49-F238E27FC236}">
+                <a16:creationId xmlns:a16="http://schemas.microsoft.com/office/drawing/2014/main" id="{D82A176F-C537-C6F4-C3D5-1841FF0361B6}"/>
+              </a:ext>
+            </a:extLst>
+          </p:cNvPr>
+          <p:cNvSpPr txBox="1">
+            <a:spLocks/>
+          </p:cNvSpPr>
+          <p:nvPr/>
+        </p:nvSpPr>
+        <p:spPr>
+          <a:xfrm>
+            <a:off x="581192" y="568482"/>
+            <a:ext cx="11029616" cy="632868"/>
+          </a:xfrm>
+          <a:prstGeom prst="rect">
+            <a:avLst/>
+          </a:prstGeom>
+        </p:spPr>
+        <p:txBody>
+          <a:bodyPr vert="horz" lIns="91440" tIns="45720" rIns="91440" bIns="45720" rtlCol="0" anchor="b">
+            <a:normAutofit fontScale="97500"/>
+          </a:bodyPr>
+          <a:lstStyle>
+            <a:lvl1pPr algn="l" defTabSz="411470" rtl="0" eaLnBrk="1" latinLnBrk="0" hangingPunct="1">
+              <a:lnSpc>
+                <a:spcPct val="100000"/>
+              </a:lnSpc>
+              <a:spcBef>
+                <a:spcPct val="0"/>
+              </a:spcBef>
+              <a:buNone/>
+              <a:defRPr sz="2520" b="0" kern="1200" cap="all">
+                <a:solidFill>
+                  <a:schemeClr val="tx1">
+                    <a:lumMod val="75000"/>
+                    <a:lumOff val="25000"/>
+                  </a:schemeClr>
+                </a:solidFill>
+                <a:latin typeface="+mj-lt"/>
+                <a:ea typeface="+mj-ea"/>
+                <a:cs typeface="+mj-cs"/>
+              </a:defRPr>
+            </a:lvl1pPr>
+            <a:lvl2pPr eaLnBrk="1" hangingPunct="1">
+              <a:defRPr>
+                <a:solidFill>
+                  <a:schemeClr val="tx2"/>
+                </a:solidFill>
+              </a:defRPr>
+            </a:lvl2pPr>
+            <a:lvl3pPr eaLnBrk="1" hangingPunct="1">
+              <a:defRPr>
+                <a:solidFill>
+                  <a:schemeClr val="tx2"/>
+                </a:solidFill>
+              </a:defRPr>
+            </a:lvl3pPr>
+            <a:lvl4pPr eaLnBrk="1" hangingPunct="1">
+              <a:defRPr>
+                <a:solidFill>
+                  <a:schemeClr val="tx2"/>
+                </a:solidFill>
+              </a:defRPr>
+            </a:lvl4pPr>
+            <a:lvl5pPr eaLnBrk="1" hangingPunct="1">
+              <a:defRPr>
+                <a:solidFill>
+                  <a:schemeClr val="tx2"/>
+                </a:solidFill>
+              </a:defRPr>
+            </a:lvl5pPr>
+            <a:lvl6pPr eaLnBrk="1" hangingPunct="1">
+              <a:defRPr>
+                <a:solidFill>
+                  <a:schemeClr val="tx2"/>
+                </a:solidFill>
+              </a:defRPr>
+            </a:lvl6pPr>
+            <a:lvl7pPr eaLnBrk="1" hangingPunct="1">
+              <a:defRPr>
+                <a:solidFill>
+                  <a:schemeClr val="tx2"/>
+                </a:solidFill>
+              </a:defRPr>
+            </a:lvl7pPr>
+            <a:lvl8pPr eaLnBrk="1" hangingPunct="1">
+              <a:defRPr>
+                <a:solidFill>
+                  <a:schemeClr val="tx2"/>
+                </a:solidFill>
+              </a:defRPr>
+            </a:lvl8pPr>
+            <a:lvl9pPr eaLnBrk="1" hangingPunct="1">
+              <a:defRPr>
+                <a:solidFill>
+                  <a:schemeClr val="tx2"/>
+                </a:solidFill>
+              </a:defRPr>
+            </a:lvl9pPr>
+          </a:lstStyle>
+          <a:p>
+            <a:r>
+              <a:rPr lang="en-US" sz="3600" dirty="0"/>
+              <a:t>Lab 04</a:t>
+            </a:r>
+          </a:p>
+        </p:txBody>
+      </p:sp>
+    </p:spTree>
+    <p:extLst>
+      <p:ext uri="{BB962C8B-B14F-4D97-AF65-F5344CB8AC3E}">
+        <p14:creationId xmlns:p14="http://schemas.microsoft.com/office/powerpoint/2010/main" val="2909911395"/>
       </p:ext>
     </p:extLst>
   </p:cSld>
